--- a/It Is Well_CH.pptx
+++ b/It Is Well_CH.pptx
@@ -267,7 +267,7 @@
           <a:p>
             <a:fld id="{E759A0DE-F190-5444-87AC-4719D5F20D15}" type="datetimeFigureOut">
               <a:rPr lang="en-US" smtClean="0"/>
-              <a:t>5/31/26</a:t>
+              <a:t>10/21/26</a:t>
             </a:fld>
             <a:endParaRPr lang="en-US"/>
           </a:p>
@@ -465,7 +465,7 @@
           <a:p>
             <a:fld id="{E759A0DE-F190-5444-87AC-4719D5F20D15}" type="datetimeFigureOut">
               <a:rPr lang="en-US" smtClean="0"/>
-              <a:t>5/31/26</a:t>
+              <a:t>10/21/26</a:t>
             </a:fld>
             <a:endParaRPr lang="en-US"/>
           </a:p>
@@ -673,7 +673,7 @@
           <a:p>
             <a:fld id="{E759A0DE-F190-5444-87AC-4719D5F20D15}" type="datetimeFigureOut">
               <a:rPr lang="en-US" smtClean="0"/>
-              <a:t>5/31/26</a:t>
+              <a:t>10/21/26</a:t>
             </a:fld>
             <a:endParaRPr lang="en-US"/>
           </a:p>
@@ -871,7 +871,7 @@
           <a:p>
             <a:fld id="{E759A0DE-F190-5444-87AC-4719D5F20D15}" type="datetimeFigureOut">
               <a:rPr lang="en-US" smtClean="0"/>
-              <a:t>5/31/26</a:t>
+              <a:t>10/21/26</a:t>
             </a:fld>
             <a:endParaRPr lang="en-US"/>
           </a:p>
@@ -1146,7 +1146,7 @@
           <a:p>
             <a:fld id="{E759A0DE-F190-5444-87AC-4719D5F20D15}" type="datetimeFigureOut">
               <a:rPr lang="en-US" smtClean="0"/>
-              <a:t>5/31/26</a:t>
+              <a:t>10/21/26</a:t>
             </a:fld>
             <a:endParaRPr lang="en-US"/>
           </a:p>
@@ -1411,7 +1411,7 @@
           <a:p>
             <a:fld id="{E759A0DE-F190-5444-87AC-4719D5F20D15}" type="datetimeFigureOut">
               <a:rPr lang="en-US" smtClean="0"/>
-              <a:t>5/31/26</a:t>
+              <a:t>10/21/26</a:t>
             </a:fld>
             <a:endParaRPr lang="en-US"/>
           </a:p>
@@ -1823,7 +1823,7 @@
           <a:p>
             <a:fld id="{E759A0DE-F190-5444-87AC-4719D5F20D15}" type="datetimeFigureOut">
               <a:rPr lang="en-US" smtClean="0"/>
-              <a:t>5/31/26</a:t>
+              <a:t>10/21/26</a:t>
             </a:fld>
             <a:endParaRPr lang="en-US"/>
           </a:p>
@@ -1964,7 +1964,7 @@
           <a:p>
             <a:fld id="{E759A0DE-F190-5444-87AC-4719D5F20D15}" type="datetimeFigureOut">
               <a:rPr lang="en-US" smtClean="0"/>
-              <a:t>5/31/26</a:t>
+              <a:t>10/21/26</a:t>
             </a:fld>
             <a:endParaRPr lang="en-US"/>
           </a:p>
@@ -2077,7 +2077,7 @@
           <a:p>
             <a:fld id="{E759A0DE-F190-5444-87AC-4719D5F20D15}" type="datetimeFigureOut">
               <a:rPr lang="en-US" smtClean="0"/>
-              <a:t>5/31/26</a:t>
+              <a:t>10/21/26</a:t>
             </a:fld>
             <a:endParaRPr lang="en-US"/>
           </a:p>
@@ -2388,7 +2388,7 @@
           <a:p>
             <a:fld id="{E759A0DE-F190-5444-87AC-4719D5F20D15}" type="datetimeFigureOut">
               <a:rPr lang="en-US" smtClean="0"/>
-              <a:t>5/31/26</a:t>
+              <a:t>10/21/26</a:t>
             </a:fld>
             <a:endParaRPr lang="en-US"/>
           </a:p>
@@ -2676,7 +2676,7 @@
           <a:p>
             <a:fld id="{E759A0DE-F190-5444-87AC-4719D5F20D15}" type="datetimeFigureOut">
               <a:rPr lang="en-US" smtClean="0"/>
-              <a:t>5/31/26</a:t>
+              <a:t>10/21/26</a:t>
             </a:fld>
             <a:endParaRPr lang="en-US"/>
           </a:p>
@@ -2917,7 +2917,7 @@
           <a:p>
             <a:fld id="{E759A0DE-F190-5444-87AC-4719D5F20D15}" type="datetimeFigureOut">
               <a:rPr lang="en-US" smtClean="0"/>
-              <a:t>5/31/26</a:t>
+              <a:t>10/21/26</a:t>
             </a:fld>
             <a:endParaRPr lang="en-US"/>
           </a:p>
@@ -3801,8 +3801,8 @@
         </p:nvSpPr>
         <p:spPr>
           <a:xfrm>
-            <a:off x="682831" y="497702"/>
-            <a:ext cx="10826338" cy="5862596"/>
+            <a:off x="203200" y="497702"/>
+            <a:ext cx="11620500" cy="5862596"/>
           </a:xfrm>
         </p:spPr>
         <p:txBody>
@@ -5053,7 +5053,7 @@
         <p:spPr>
           <a:xfrm>
             <a:off x="682831" y="497702"/>
-            <a:ext cx="10826338" cy="5862596"/>
+            <a:ext cx="11128169" cy="5862596"/>
           </a:xfrm>
         </p:spPr>
         <p:txBody>
@@ -5147,6 +5147,46 @@
                 <a:ea typeface="Bodoni Ornaments" pitchFamily="2" charset="0"/>
               </a:rPr>
               <a:t>It is well, it is well with my soul</a:t>
+            </a:r>
+          </a:p>
+        </p:txBody>
+      </p:sp>
+      <p:sp>
+        <p:nvSpPr>
+          <p:cNvPr id="2" name="TextBox 1">
+            <a:extLst>
+              <a:ext uri="{FF2B5EF4-FFF2-40B4-BE49-F238E27FC236}">
+                <a16:creationId xmlns:a16="http://schemas.microsoft.com/office/drawing/2014/main" id="{CA3F2AF3-E7F3-D5DA-F958-95B195C78991}"/>
+              </a:ext>
+            </a:extLst>
+          </p:cNvPr>
+          <p:cNvSpPr txBox="1"/>
+          <p:nvPr/>
+        </p:nvSpPr>
+        <p:spPr>
+          <a:xfrm>
+            <a:off x="9639300" y="6211669"/>
+            <a:ext cx="2552700" cy="646331"/>
+          </a:xfrm>
+          <a:prstGeom prst="rect">
+            <a:avLst/>
+          </a:prstGeom>
+          <a:noFill/>
+        </p:spPr>
+        <p:txBody>
+          <a:bodyPr wrap="square" rtlCol="0">
+            <a:spAutoFit/>
+          </a:bodyPr>
+          <a:lstStyle/>
+          <a:p>
+            <a:pPr algn="r"/>
+            <a:r>
+              <a:rPr lang="en-US" sz="3600" b="1" dirty="0">
+                <a:solidFill>
+                  <a:schemeClr val="bg1"/>
+                </a:solidFill>
+              </a:rPr>
+              <a:t>END</a:t>
             </a:r>
           </a:p>
         </p:txBody>
